--- a/doc/migrate_vmware_presentation.pptx
+++ b/doc/migrate_vmware_presentation.pptx
@@ -3303,7 +3303,7 @@
               </a:defRPr>
             </a:pPr>
             <a:r>
-              <a:t>Clone safely. Export once. Land natively.</a:t>
+              <a:t>Clone safely. Export per run. Land natively.</a:t>
             </a:r>
           </a:p>
         </p:txBody>
@@ -8686,7 +8686,7 @@
               </a:defRPr>
             </a:pPr>
             <a:r>
-              <a:t>manifest kept with the run</a:t>
+              <a:t>manifest retained on resumable runs</a:t>
             </a:r>
           </a:p>
         </p:txBody>
@@ -9171,7 +9171,7 @@
               </a:defRPr>
             </a:pPr>
             <a:r>
-              <a:t>failed runs keep resumable artifacts</a:t>
+              <a:t>failed artifacts retained by target</a:t>
             </a:r>
           </a:p>
         </p:txBody>
@@ -9259,7 +9259,7 @@
               </a:defRPr>
             </a:pPr>
             <a:r>
-              <a:t>RESUME A FAILED RUN</a:t>
+              <a:t>RECOVERY BY TARGET</a:t>
             </a:r>
           </a:p>
         </p:txBody>
@@ -9304,7 +9304,7 @@
               </a:defRPr>
             </a:pPr>
             <a:r>
-              <a:t>-e resume_run_id=&lt;id&gt;              reuses the export and any disks already imported</a:t>
+              <a:t>OpenStack / GCP: -e resume_run_id=&lt;id&gt; reuses the export and completed disk imports.</a:t>
             </a:r>
           </a:p>
           <a:p>
@@ -9326,7 +9326,7 @@
               </a:defRPr>
             </a:pPr>
             <a:r>
-              <a:t>-e discard_failed_artifacts=true   deletes the retained artifacts instead</a:t>
+              <a:t>AWS: failed imports retain the staged S3 OVA; -e discard_failed_artifacts=true deletes it.</a:t>
             </a:r>
           </a:p>
         </p:txBody>
@@ -10335,7 +10335,7 @@
               </a:defRPr>
             </a:pPr>
             <a:r>
-              <a:t>Resumable, reconciled runs</a:t>
+              <a:t>Recovery by target; catalogs reconcile</a:t>
             </a:r>
           </a:p>
         </p:txBody>
@@ -12476,7 +12476,7 @@
               </a:defRPr>
             </a:pPr>
             <a:r>
-              <a:t>One common front half. Three native landings.</a:t>
+              <a:t>Shared export flow. Separate target runs.</a:t>
             </a:r>
           </a:p>
         </p:txBody>
@@ -12607,7 +12607,7 @@
               </a:defRPr>
             </a:pPr>
             <a:r>
-              <a:t>SHARED VSPHERE STAGES</a:t>
+              <a:t>COMMON RUN FLOW</a:t>
             </a:r>
           </a:p>
         </p:txBody>
@@ -14534,7 +14534,7 @@
               </a:defRPr>
             </a:pPr>
             <a:r>
-              <a:t>Common mechanics stay common. Only the edge varies.</a:t>
+              <a:t>Each target run repeats snapshot, clone, and export before its own target import.</a:t>
             </a:r>
           </a:p>
         </p:txBody>
@@ -14785,7 +14785,7 @@
               </a:defRPr>
             </a:pPr>
             <a:r>
-              <a:t>The OVA is the handoff contract</a:t>
+              <a:t>The manifest is the handoff contract</a:t>
             </a:r>
           </a:p>
         </p:txBody>
@@ -21386,7 +21386,7 @@
               </a:defRPr>
             </a:pPr>
             <a:r>
-              <a:t>Launch boots from image 0, creates Cinder volumes for the rest, and can reuse the source MAC addresses.</a:t>
+              <a:t>Launch uses image 0 and Cinder volumes; source MACs can be reused. Optional: bin/stage-v2v.sh prepares CentOS 7 static-IP guests for DHCP.</a:t>
             </a:r>
           </a:p>
         </p:txBody>
@@ -24192,7 +24192,7 @@
               </a:defRPr>
             </a:pPr>
             <a:r>
-              <a:t>Retries touch only the half that failed. Approval stays a visible, human step.</a:t>
+              <a:t>Migration and launch can be rerun independently; recovery is target-specific.</a:t>
             </a:r>
           </a:p>
         </p:txBody>
